--- a/assemblies-and-events/childrens-mental-health-week/downloads/Childrens_Mental_Health_Week_Slides.pptx
+++ b/assemblies-and-events/childrens-mental-health-week/downloads/Childrens_Mental_Health_Week_Slides.pptx
@@ -3203,11 +3203,11 @@
               </a:spcAft>
             </a:pPr>
             <a:r>
-              <a:rPr sz="3400" b="1" i="0">
+              <a:rPr sz="3400" b="0" i="0">
                 <a:solidFill>
                   <a:srgbClr val="A8452C"/>
                 </a:solidFill>
-                <a:latin typeface="Libre Caslon Display"/>
+                <a:latin typeface="Georgia"/>
               </a:rPr>
               <a:t>Children’s Mental Health Week</a:t>
             </a:r>
@@ -3293,7 +3293,7 @@
                 <a:solidFill>
                   <a:srgbClr val="5C6552"/>
                 </a:solidFill>
-                <a:latin typeface="Karla"/>
+                <a:latin typeface="Calibri"/>
               </a:rPr>
               <a:t>An Assembly and Five Lunchtimes</a:t>
             </a:r>
@@ -3335,7 +3335,7 @@
                 <a:solidFill>
                   <a:srgbClr val="8B9179"/>
                 </a:solidFill>
-                <a:latin typeface="Karla"/>
+                <a:latin typeface="Calibri"/>
               </a:rPr>
               <a:t>1 to 7 February 2027  ·  Step into Our World</a:t>
             </a:r>
@@ -3401,7 +3401,7 @@
                 <a:solidFill>
                   <a:srgbClr val="8B9179"/>
                 </a:solidFill>
-                <a:latin typeface="Karla"/>
+                <a:latin typeface="Calibri"/>
               </a:rPr>
               <a:t>The Pastoral Guide</a:t>
             </a:r>
@@ -3443,7 +3443,7 @@
                 <a:solidFill>
                   <a:srgbClr val="8B9179"/>
                 </a:solidFill>
-                <a:latin typeface="Karla"/>
+                <a:latin typeface="Calibri"/>
               </a:rPr>
               <a:t>1 / 17</a:t>
             </a:r>
@@ -3547,7 +3547,7 @@
                 <a:solidFill>
                   <a:srgbClr val="A8452C"/>
                 </a:solidFill>
-                <a:latin typeface="Karla"/>
+                <a:latin typeface="Calibri"/>
               </a:rPr>
               <a:t>AT LUNCHTIME THIS WEEK</a:t>
             </a:r>
@@ -3585,11 +3585,11 @@
               </a:spcAft>
             </a:pPr>
             <a:r>
-              <a:rPr sz="3200" b="1" i="0">
+              <a:rPr sz="3200" b="0" i="0">
                 <a:solidFill>
                   <a:srgbClr val="2E3436"/>
                 </a:solidFill>
-                <a:latin typeface="Libre Caslon Display"/>
+                <a:latin typeface="Georgia"/>
               </a:rPr>
               <a:t>Something different every day</a:t>
             </a:r>
@@ -3675,7 +3675,7 @@
                 <a:solidFill>
                   <a:srgbClr val="A8452C"/>
                 </a:solidFill>
-                <a:latin typeface="Karla"/>
+                <a:latin typeface="Calibri"/>
               </a:rPr>
               <a:t>MONDAY</a:t>
             </a:r>
@@ -3781,11 +3781,11 @@
               </a:spcAft>
             </a:pPr>
             <a:r>
-              <a:rPr sz="1200" b="1" i="0">
+              <a:rPr sz="1200" b="0" i="0">
                 <a:solidFill>
                   <a:srgbClr val="A8452C"/>
                 </a:solidFill>
-                <a:latin typeface="Libre Caslon Display"/>
+                <a:latin typeface="Georgia"/>
               </a:rPr>
               <a:t>Find</a:t>
             </a:r>
@@ -3800,11 +3800,11 @@
               </a:spcAft>
             </a:pPr>
             <a:r>
-              <a:rPr sz="1200" b="1" i="0">
+              <a:rPr sz="1200" b="0" i="0">
                 <a:solidFill>
                   <a:srgbClr val="A8452C"/>
                 </a:solidFill>
-                <a:latin typeface="Libre Caslon Display"/>
+                <a:latin typeface="Georgia"/>
               </a:rPr>
               <a:t>Someone Who</a:t>
             </a:r>
@@ -3890,7 +3890,7 @@
                 <a:solidFill>
                   <a:srgbClr val="A8452C"/>
                 </a:solidFill>
-                <a:latin typeface="Karla"/>
+                <a:latin typeface="Calibri"/>
               </a:rPr>
               <a:t>TUESDAY</a:t>
             </a:r>
@@ -3996,11 +3996,11 @@
               </a:spcAft>
             </a:pPr>
             <a:r>
-              <a:rPr sz="1200" b="1" i="0">
+              <a:rPr sz="1200" b="0" i="0">
                 <a:solidFill>
                   <a:srgbClr val="A8452C"/>
                 </a:solidFill>
-                <a:latin typeface="Libre Caslon Display"/>
+                <a:latin typeface="Georgia"/>
               </a:rPr>
               <a:t>One Question,</a:t>
             </a:r>
@@ -4015,11 +4015,11 @@
               </a:spcAft>
             </a:pPr>
             <a:r>
-              <a:rPr sz="1200" b="1" i="0">
+              <a:rPr sz="1200" b="0" i="0">
                 <a:solidFill>
                   <a:srgbClr val="A8452C"/>
                 </a:solidFill>
-                <a:latin typeface="Libre Caslon Display"/>
+                <a:latin typeface="Georgia"/>
               </a:rPr>
               <a:t>Every Year</a:t>
             </a:r>
@@ -4105,7 +4105,7 @@
                 <a:solidFill>
                   <a:srgbClr val="A8452C"/>
                 </a:solidFill>
-                <a:latin typeface="Karla"/>
+                <a:latin typeface="Calibri"/>
               </a:rPr>
               <a:t>WEDNESDAY</a:t>
             </a:r>
@@ -4211,11 +4211,11 @@
               </a:spcAft>
             </a:pPr>
             <a:r>
-              <a:rPr sz="1200" b="1" i="0">
+              <a:rPr sz="1200" b="0" i="0">
                 <a:solidFill>
                   <a:srgbClr val="A8452C"/>
                 </a:solidFill>
-                <a:latin typeface="Libre Caslon Display"/>
+                <a:latin typeface="Georgia"/>
               </a:rPr>
               <a:t>Five-Word</a:t>
             </a:r>
@@ -4230,11 +4230,11 @@
               </a:spcAft>
             </a:pPr>
             <a:r>
-              <a:rPr sz="1200" b="1" i="0">
+              <a:rPr sz="1200" b="0" i="0">
                 <a:solidFill>
                   <a:srgbClr val="A8452C"/>
                 </a:solidFill>
-                <a:latin typeface="Libre Caslon Display"/>
+                <a:latin typeface="Georgia"/>
               </a:rPr>
               <a:t>Days</a:t>
             </a:r>
@@ -4320,7 +4320,7 @@
                 <a:solidFill>
                   <a:srgbClr val="A8452C"/>
                 </a:solidFill>
-                <a:latin typeface="Karla"/>
+                <a:latin typeface="Calibri"/>
               </a:rPr>
               <a:t>THURSDAY</a:t>
             </a:r>
@@ -4426,11 +4426,11 @@
               </a:spcAft>
             </a:pPr>
             <a:r>
-              <a:rPr sz="1200" b="1" i="0">
+              <a:rPr sz="1200" b="0" i="0">
                 <a:solidFill>
                   <a:srgbClr val="A8452C"/>
                 </a:solidFill>
-                <a:latin typeface="Libre Caslon Display"/>
+                <a:latin typeface="Georgia"/>
               </a:rPr>
               <a:t>Ask the</a:t>
             </a:r>
@@ -4445,11 +4445,11 @@
               </a:spcAft>
             </a:pPr>
             <a:r>
-              <a:rPr sz="1200" b="1" i="0">
+              <a:rPr sz="1200" b="0" i="0">
                 <a:solidFill>
                   <a:srgbClr val="A8452C"/>
                 </a:solidFill>
-                <a:latin typeface="Libre Caslon Display"/>
+                <a:latin typeface="Georgia"/>
               </a:rPr>
               <a:t>Year Above</a:t>
             </a:r>
@@ -4535,7 +4535,7 @@
                 <a:solidFill>
                   <a:srgbClr val="A8452C"/>
                 </a:solidFill>
-                <a:latin typeface="Karla"/>
+                <a:latin typeface="Calibri"/>
               </a:rPr>
               <a:t>FRIDAY</a:t>
             </a:r>
@@ -4641,11 +4641,11 @@
               </a:spcAft>
             </a:pPr>
             <a:r>
-              <a:rPr sz="1200" b="1" i="0">
+              <a:rPr sz="1200" b="0" i="0">
                 <a:solidFill>
                   <a:srgbClr val="A8452C"/>
                 </a:solidFill>
-                <a:latin typeface="Libre Caslon Display"/>
+                <a:latin typeface="Georgia"/>
               </a:rPr>
               <a:t>Guess the</a:t>
             </a:r>
@@ -4660,11 +4660,11 @@
               </a:spcAft>
             </a:pPr>
             <a:r>
-              <a:rPr sz="1200" b="1" i="0">
+              <a:rPr sz="1200" b="0" i="0">
                 <a:solidFill>
                   <a:srgbClr val="A8452C"/>
                 </a:solidFill>
-                <a:latin typeface="Libre Caslon Display"/>
+                <a:latin typeface="Georgia"/>
               </a:rPr>
               <a:t>Teacher</a:t>
             </a:r>
@@ -4706,7 +4706,7 @@
                 <a:solidFill>
                   <a:srgbClr val="A8452C"/>
                 </a:solidFill>
-                <a:latin typeface="Karla"/>
+                <a:latin typeface="Calibri"/>
               </a:rPr>
               <a:t>Everyone is welcome at every one.</a:t>
             </a:r>
@@ -4772,7 +4772,7 @@
                 <a:solidFill>
                   <a:srgbClr val="8B9179"/>
                 </a:solidFill>
-                <a:latin typeface="Karla"/>
+                <a:latin typeface="Calibri"/>
               </a:rPr>
               <a:t>The Pastoral Guide</a:t>
             </a:r>
@@ -4814,7 +4814,7 @@
                 <a:solidFill>
                   <a:srgbClr val="8B9179"/>
                 </a:solidFill>
-                <a:latin typeface="Karla"/>
+                <a:latin typeface="Calibri"/>
               </a:rPr>
               <a:t>10 / 17</a:t>
             </a:r>
@@ -4914,11 +4914,11 @@
               </a:spcAft>
             </a:pPr>
             <a:r>
-              <a:rPr sz="2800" b="1" i="0">
+              <a:rPr sz="2800" b="0" i="0">
                 <a:solidFill>
                   <a:srgbClr val="FFFDF7"/>
                 </a:solidFill>
-                <a:latin typeface="Libre Caslon Display"/>
+                <a:latin typeface="Georgia"/>
               </a:rPr>
               <a:t>You can’t hear their song.</a:t>
             </a:r>
@@ -4936,11 +4936,11 @@
               </a:spcAft>
             </a:pPr>
             <a:r>
-              <a:rPr sz="2800" b="1" i="0">
+              <a:rPr sz="2800" b="0" i="0">
                 <a:solidFill>
                   <a:srgbClr val="FFFDF7"/>
                 </a:solidFill>
-                <a:latin typeface="Libre Caslon Display"/>
+                <a:latin typeface="Georgia"/>
               </a:rPr>
               <a:t>They can’t hear yours.</a:t>
             </a:r>
@@ -5026,7 +5026,7 @@
                 <a:solidFill>
                   <a:srgbClr val="F8DED3"/>
                 </a:solidFill>
-                <a:latin typeface="Karla"/>
+                <a:latin typeface="Calibri"/>
               </a:rPr>
               <a:t>So ask them about theirs, and tell them about yours.</a:t>
             </a:r>
@@ -5045,7 +5045,7 @@
                 <a:solidFill>
                   <a:srgbClr val="F8DED3"/>
                 </a:solidFill>
-                <a:latin typeface="Karla"/>
+                <a:latin typeface="Calibri"/>
               </a:rPr>
               <a:t>If something is wrong, tell someone you trust.</a:t>
             </a:r>
@@ -5111,7 +5111,7 @@
                 <a:solidFill>
                   <a:srgbClr val="F8DED3"/>
                 </a:solidFill>
-                <a:latin typeface="Karla"/>
+                <a:latin typeface="Calibri"/>
               </a:rPr>
               <a:t>The Pastoral Guide</a:t>
             </a:r>
@@ -5153,7 +5153,7 @@
                 <a:solidFill>
                   <a:srgbClr val="F8DED3"/>
                 </a:solidFill>
-                <a:latin typeface="Karla"/>
+                <a:latin typeface="Calibri"/>
               </a:rPr>
               <a:t>11 / 17</a:t>
             </a:r>
@@ -5277,11 +5277,11 @@
               </a:spcAft>
             </a:pPr>
             <a:r>
-              <a:rPr sz="3200" b="1" i="0">
+              <a:rPr sz="3200" b="0" i="0">
                 <a:solidFill>
                   <a:srgbClr val="A8452C"/>
                 </a:solidFill>
-                <a:latin typeface="Libre Caslon Display"/>
+                <a:latin typeface="Georgia"/>
               </a:rPr>
               <a:t>Step into someone else’s world.</a:t>
             </a:r>
@@ -5323,7 +5323,7 @@
                 <a:solidFill>
                   <a:srgbClr val="5C6552"/>
                 </a:solidFill>
-                <a:latin typeface="Karla"/>
+                <a:latin typeface="Calibri"/>
               </a:rPr>
               <a:t>At lunchtime today: Find Someone Who.</a:t>
             </a:r>
@@ -5365,7 +5365,7 @@
                 <a:solidFill>
                   <a:srgbClr val="8B9179"/>
                 </a:solidFill>
-                <a:latin typeface="Karla"/>
+                <a:latin typeface="Calibri"/>
               </a:rPr>
               <a:t>Children’s Mental Health Week  ·  An Assembly and Five Lunchtimes</a:t>
             </a:r>
@@ -5431,7 +5431,7 @@
                 <a:solidFill>
                   <a:srgbClr val="8B9179"/>
                 </a:solidFill>
-                <a:latin typeface="Karla"/>
+                <a:latin typeface="Calibri"/>
               </a:rPr>
               <a:t>The Pastoral Guide</a:t>
             </a:r>
@@ -5473,7 +5473,7 @@
                 <a:solidFill>
                   <a:srgbClr val="8B9179"/>
                 </a:solidFill>
-                <a:latin typeface="Karla"/>
+                <a:latin typeface="Calibri"/>
               </a:rPr>
               <a:t>12 / 17</a:t>
             </a:r>
@@ -5590,7 +5590,7 @@
                 <a:solidFill>
                   <a:srgbClr val="A8452C"/>
                 </a:solidFill>
-                <a:latin typeface="Karla"/>
+                <a:latin typeface="Calibri"/>
               </a:rPr>
               <a:t>LUNCHTIME  ·  MONDAY</a:t>
             </a:r>
@@ -5628,11 +5628,11 @@
               </a:spcAft>
             </a:pPr>
             <a:r>
-              <a:rPr sz="3000" b="1" i="0">
+              <a:rPr sz="3000" b="0" i="0">
                 <a:solidFill>
                   <a:srgbClr val="2E3436"/>
                 </a:solidFill>
-                <a:latin typeface="Libre Caslon Display"/>
+                <a:latin typeface="Georgia"/>
               </a:rPr>
               <a:t>Find Someone Who</a:t>
             </a:r>
@@ -5674,7 +5674,7 @@
                 <a:solidFill>
                   <a:srgbClr val="5C6552"/>
                 </a:solidFill>
-                <a:latin typeface="Karla"/>
+                <a:latin typeface="Calibri"/>
               </a:rPr>
               <a:t>Write a different first name in each square, then ask that person one more question.</a:t>
             </a:r>
@@ -5824,11 +5824,11 @@
               </a:spcAft>
             </a:pPr>
             <a:r>
-              <a:rPr sz="1350" b="1" i="0">
+              <a:rPr sz="1350" b="0" i="0">
                 <a:solidFill>
                   <a:srgbClr val="A8452C"/>
                 </a:solidFill>
-                <a:latin typeface="Libre Caslon Display"/>
+                <a:latin typeface="Georgia"/>
               </a:rPr>
               <a:t>One name a square</a:t>
             </a:r>
@@ -5870,7 +5870,7 @@
                 <a:solidFill>
                   <a:srgbClr val="5C6552"/>
                 </a:solidFill>
-                <a:latin typeface="Karla"/>
+                <a:latin typeface="Calibri"/>
               </a:rPr>
               <a:t>One square per person.</a:t>
             </a:r>
@@ -6020,11 +6020,11 @@
               </a:spcAft>
             </a:pPr>
             <a:r>
-              <a:rPr sz="1350" b="1" i="0">
+              <a:rPr sz="1350" b="0" i="0">
                 <a:solidFill>
                   <a:srgbClr val="A8452C"/>
                 </a:solidFill>
-                <a:latin typeface="Libre Caslon Display"/>
+                <a:latin typeface="Georgia"/>
               </a:rPr>
               <a:t>Ask one more</a:t>
             </a:r>
@@ -6066,7 +6066,7 @@
                 <a:solidFill>
                   <a:srgbClr val="5C6552"/>
                 </a:solidFill>
-                <a:latin typeface="Karla"/>
+                <a:latin typeface="Calibri"/>
               </a:rPr>
               <a:t>How? Why? What was it like?</a:t>
             </a:r>
@@ -6216,11 +6216,11 @@
               </a:spcAft>
             </a:pPr>
             <a:r>
-              <a:rPr sz="1350" b="1" i="0">
+              <a:rPr sz="1350" b="0" i="0">
                 <a:solidFill>
                   <a:srgbClr val="A8452C"/>
                 </a:solidFill>
-                <a:latin typeface="Libre Caslon Display"/>
+                <a:latin typeface="Georgia"/>
               </a:rPr>
               <a:t>Get a line</a:t>
             </a:r>
@@ -6262,7 +6262,7 @@
                 <a:solidFill>
                   <a:srgbClr val="5C6552"/>
                 </a:solidFill>
-                <a:latin typeface="Karla"/>
+                <a:latin typeface="Calibri"/>
               </a:rPr>
               <a:t>Then try for the whole card.</a:t>
             </a:r>
@@ -6304,7 +6304,7 @@
                 <a:solidFill>
                   <a:srgbClr val="A8452C"/>
                 </a:solidFill>
-                <a:latin typeface="Karla"/>
+                <a:latin typeface="Calibri"/>
               </a:rPr>
               <a:t>Talk to at least one person you don’t usually talk to.</a:t>
             </a:r>
@@ -6370,7 +6370,7 @@
                 <a:solidFill>
                   <a:srgbClr val="8B9179"/>
                 </a:solidFill>
-                <a:latin typeface="Karla"/>
+                <a:latin typeface="Calibri"/>
               </a:rPr>
               <a:t>The Pastoral Guide</a:t>
             </a:r>
@@ -6412,7 +6412,7 @@
                 <a:solidFill>
                   <a:srgbClr val="8B9179"/>
                 </a:solidFill>
-                <a:latin typeface="Karla"/>
+                <a:latin typeface="Calibri"/>
               </a:rPr>
               <a:t>13 / 17</a:t>
             </a:r>
@@ -6529,7 +6529,7 @@
                 <a:solidFill>
                   <a:srgbClr val="A8452C"/>
                 </a:solidFill>
-                <a:latin typeface="Karla"/>
+                <a:latin typeface="Calibri"/>
               </a:rPr>
               <a:t>LUNCHTIME  ·  TUESDAY</a:t>
             </a:r>
@@ -6567,11 +6567,11 @@
               </a:spcAft>
             </a:pPr>
             <a:r>
-              <a:rPr sz="3000" b="1" i="0">
+              <a:rPr sz="3000" b="0" i="0">
                 <a:solidFill>
                   <a:srgbClr val="2E3436"/>
                 </a:solidFill>
-                <a:latin typeface="Libre Caslon Display"/>
+                <a:latin typeface="Georgia"/>
               </a:rPr>
               <a:t>One Question, Every Year</a:t>
             </a:r>
@@ -6613,7 +6613,7 @@
                 <a:solidFill>
                   <a:srgbClr val="5C6552"/>
                 </a:solidFill>
-                <a:latin typeface="Karla"/>
+                <a:latin typeface="Calibri"/>
               </a:rPr>
               <a:t>Today’s question: What do you wish adults understood about being your age?</a:t>
             </a:r>
@@ -6763,11 +6763,11 @@
               </a:spcAft>
             </a:pPr>
             <a:r>
-              <a:rPr sz="1350" b="1" i="0">
+              <a:rPr sz="1350" b="0" i="0">
                 <a:solidFill>
                   <a:srgbClr val="A8452C"/>
                 </a:solidFill>
-                <a:latin typeface="Libre Caslon Display"/>
+                <a:latin typeface="Georgia"/>
               </a:rPr>
               <a:t>Your year’s colour</a:t>
             </a:r>
@@ -6809,7 +6809,7 @@
                 <a:solidFill>
                   <a:srgbClr val="5C6552"/>
                 </a:solidFill>
-                <a:latin typeface="Karla"/>
+                <a:latin typeface="Calibri"/>
               </a:rPr>
               <a:t>Each year group has its own colour of note.</a:t>
             </a:r>
@@ -6959,11 +6959,11 @@
               </a:spcAft>
             </a:pPr>
             <a:r>
-              <a:rPr sz="1350" b="1" i="0">
+              <a:rPr sz="1350" b="0" i="0">
                 <a:solidFill>
                   <a:srgbClr val="A8452C"/>
                 </a:solidFill>
-                <a:latin typeface="Libre Caslon Display"/>
+                <a:latin typeface="Georgia"/>
               </a:rPr>
               <a:t>No names</a:t>
             </a:r>
@@ -7005,7 +7005,7 @@
                 <a:solidFill>
                   <a:srgbClr val="5C6552"/>
                 </a:solidFill>
-                <a:latin typeface="Karla"/>
+                <a:latin typeface="Calibri"/>
               </a:rPr>
               <a:t>Write it honestly. Notes are read before they go up.</a:t>
             </a:r>
@@ -7155,11 +7155,11 @@
               </a:spcAft>
             </a:pPr>
             <a:r>
-              <a:rPr sz="1350" b="1" i="0">
+              <a:rPr sz="1350" b="0" i="0">
                 <a:solidFill>
                   <a:srgbClr val="A8452C"/>
                 </a:solidFill>
-                <a:latin typeface="Libre Caslon Display"/>
+                <a:latin typeface="Georgia"/>
               </a:rPr>
               <a:t>Read the board</a:t>
             </a:r>
@@ -7201,7 +7201,7 @@
                 <a:solidFill>
                   <a:srgbClr val="5C6552"/>
                 </a:solidFill>
-                <a:latin typeface="Karla"/>
+                <a:latin typeface="Calibri"/>
               </a:rPr>
               <a:t>By Friday it shows what every year thinks.</a:t>
             </a:r>
@@ -7243,7 +7243,7 @@
                 <a:solidFill>
                   <a:srgbClr val="A8452C"/>
                 </a:solidFill>
-                <a:latin typeface="Karla"/>
+                <a:latin typeface="Calibri"/>
               </a:rPr>
               <a:t>You might find the year above you wishes the same thing.</a:t>
             </a:r>
@@ -7309,7 +7309,7 @@
                 <a:solidFill>
                   <a:srgbClr val="8B9179"/>
                 </a:solidFill>
-                <a:latin typeface="Karla"/>
+                <a:latin typeface="Calibri"/>
               </a:rPr>
               <a:t>The Pastoral Guide</a:t>
             </a:r>
@@ -7351,7 +7351,7 @@
                 <a:solidFill>
                   <a:srgbClr val="8B9179"/>
                 </a:solidFill>
-                <a:latin typeface="Karla"/>
+                <a:latin typeface="Calibri"/>
               </a:rPr>
               <a:t>14 / 17</a:t>
             </a:r>
@@ -7468,7 +7468,7 @@
                 <a:solidFill>
                   <a:srgbClr val="A8452C"/>
                 </a:solidFill>
-                <a:latin typeface="Karla"/>
+                <a:latin typeface="Calibri"/>
               </a:rPr>
               <a:t>LUNCHTIME  ·  WEDNESDAY</a:t>
             </a:r>
@@ -7506,11 +7506,11 @@
               </a:spcAft>
             </a:pPr>
             <a:r>
-              <a:rPr sz="3000" b="1" i="0">
+              <a:rPr sz="3000" b="0" i="0">
                 <a:solidFill>
                   <a:srgbClr val="2E3436"/>
                 </a:solidFill>
-                <a:latin typeface="Libre Caslon Display"/>
+                <a:latin typeface="Georgia"/>
               </a:rPr>
               <a:t>Five-Word Days</a:t>
             </a:r>
@@ -7552,7 +7552,7 @@
                 <a:solidFill>
                   <a:srgbClr val="5C6552"/>
                 </a:solidFill>
-                <a:latin typeface="Karla"/>
+                <a:latin typeface="Calibri"/>
               </a:rPr>
               <a:t>Write your day in exactly five words. No names. Every card is read, then pinned up.</a:t>
             </a:r>
@@ -7634,11 +7634,11 @@
               </a:spcAft>
             </a:pPr>
             <a:r>
-              <a:rPr sz="1300" b="1" i="0">
+              <a:rPr sz="1300" b="0" i="0">
                 <a:solidFill>
                   <a:srgbClr val="A8452C"/>
                 </a:solidFill>
-                <a:latin typeface="Libre Caslon Display"/>
+                <a:latin typeface="Georgia"/>
               </a:rPr>
               <a:t>“Late bus. Good lunch. Maths.”</a:t>
             </a:r>
@@ -7680,7 +7680,7 @@
                 <a:solidFill>
                   <a:srgbClr val="5C6552"/>
                 </a:solidFill>
-                <a:latin typeface="Karla"/>
+                <a:latin typeface="Calibri"/>
               </a:rPr>
               <a:t>A normal day.</a:t>
             </a:r>
@@ -7762,11 +7762,11 @@
               </a:spcAft>
             </a:pPr>
             <a:r>
-              <a:rPr sz="1300" b="1" i="0">
+              <a:rPr sz="1300" b="0" i="0">
                 <a:solidFill>
                   <a:srgbClr val="A8452C"/>
                 </a:solidFill>
-                <a:latin typeface="Libre Caslon Display"/>
+                <a:latin typeface="Georgia"/>
               </a:rPr>
               <a:t>“Tired, then football fixed it.”</a:t>
             </a:r>
@@ -7808,7 +7808,7 @@
                 <a:solidFill>
                   <a:srgbClr val="5C6552"/>
                 </a:solidFill>
-                <a:latin typeface="Karla"/>
+                <a:latin typeface="Calibri"/>
               </a:rPr>
               <a:t>A day that turned round.</a:t>
             </a:r>
@@ -7890,11 +7890,11 @@
               </a:spcAft>
             </a:pPr>
             <a:r>
-              <a:rPr sz="1300" b="1" i="0">
+              <a:rPr sz="1300" b="0" i="0">
                 <a:solidFill>
                   <a:srgbClr val="A8452C"/>
                 </a:solidFill>
-                <a:latin typeface="Libre Caslon Display"/>
+                <a:latin typeface="Georgia"/>
               </a:rPr>
               <a:t>“Forgot homework. Teacher was kind.”</a:t>
             </a:r>
@@ -7936,7 +7936,7 @@
                 <a:solidFill>
                   <a:srgbClr val="5C6552"/>
                 </a:solidFill>
-                <a:latin typeface="Karla"/>
+                <a:latin typeface="Calibri"/>
               </a:rPr>
               <a:t>A day with one kind moment in it.</a:t>
             </a:r>
@@ -7978,7 +7978,7 @@
                 <a:solidFill>
                   <a:srgbClr val="A8452C"/>
                 </a:solidFill>
-                <a:latin typeface="Karla"/>
+                <a:latin typeface="Calibri"/>
               </a:rPr>
               <a:t>Read some of the others. Every one is somebody’s real day.</a:t>
             </a:r>
@@ -8044,7 +8044,7 @@
                 <a:solidFill>
                   <a:srgbClr val="8B9179"/>
                 </a:solidFill>
-                <a:latin typeface="Karla"/>
+                <a:latin typeface="Calibri"/>
               </a:rPr>
               <a:t>The Pastoral Guide</a:t>
             </a:r>
@@ -8086,7 +8086,7 @@
                 <a:solidFill>
                   <a:srgbClr val="8B9179"/>
                 </a:solidFill>
-                <a:latin typeface="Karla"/>
+                <a:latin typeface="Calibri"/>
               </a:rPr>
               <a:t>15 / 17</a:t>
             </a:r>
@@ -8203,7 +8203,7 @@
                 <a:solidFill>
                   <a:srgbClr val="A8452C"/>
                 </a:solidFill>
-                <a:latin typeface="Karla"/>
+                <a:latin typeface="Calibri"/>
               </a:rPr>
               <a:t>LUNCHTIME  ·  THURSDAY</a:t>
             </a:r>
@@ -8241,11 +8241,11 @@
               </a:spcAft>
             </a:pPr>
             <a:r>
-              <a:rPr sz="3000" b="1" i="0">
+              <a:rPr sz="3000" b="0" i="0">
                 <a:solidFill>
                   <a:srgbClr val="2E3436"/>
                 </a:solidFill>
-                <a:latin typeface="Libre Caslon Display"/>
+                <a:latin typeface="Georgia"/>
               </a:rPr>
               <a:t>Ask the Year Above</a:t>
             </a:r>
@@ -8287,7 +8287,7 @@
                 <a:solidFill>
                   <a:srgbClr val="5C6552"/>
                 </a:solidFill>
-                <a:latin typeface="Karla"/>
+                <a:latin typeface="Calibri"/>
               </a:rPr>
               <a:t>Put a question in the box, with no name on it. Older students answer as many as they can.</a:t>
             </a:r>
@@ -8369,11 +8369,11 @@
               </a:spcAft>
             </a:pPr>
             <a:r>
-              <a:rPr sz="1350" b="1" i="0">
+              <a:rPr sz="1350" b="0" i="0">
                 <a:solidFill>
                   <a:srgbClr val="A8452C"/>
                 </a:solidFill>
-                <a:latin typeface="Libre Caslon Display"/>
+                <a:latin typeface="Georgia"/>
               </a:rPr>
               <a:t>You could ask</a:t>
             </a:r>
@@ -8459,7 +8459,7 @@
                 <a:solidFill>
                   <a:srgbClr val="2E3436"/>
                 </a:solidFill>
-                <a:latin typeface="Karla"/>
+                <a:latin typeface="Calibri"/>
               </a:rPr>
               <a:t>What is hardest about next year?</a:t>
             </a:r>
@@ -8545,7 +8545,7 @@
                 <a:solidFill>
                   <a:srgbClr val="2E3436"/>
                 </a:solidFill>
-                <a:latin typeface="Karla"/>
+                <a:latin typeface="Calibri"/>
               </a:rPr>
               <a:t>What do you wish you had known?</a:t>
             </a:r>
@@ -8631,7 +8631,7 @@
                 <a:solidFill>
                   <a:srgbClr val="2E3436"/>
                 </a:solidFill>
-                <a:latin typeface="Karla"/>
+                <a:latin typeface="Calibri"/>
               </a:rPr>
               <a:t>What helped when it got hard?</a:t>
             </a:r>
@@ -8713,11 +8713,11 @@
               </a:spcAft>
             </a:pPr>
             <a:r>
-              <a:rPr sz="1350" b="1" i="0">
+              <a:rPr sz="1350" b="0" i="0">
                 <a:solidFill>
                   <a:srgbClr val="A8452C"/>
                 </a:solidFill>
-                <a:latin typeface="Libre Caslon Display"/>
+                <a:latin typeface="Georgia"/>
               </a:rPr>
               <a:t>The rules</a:t>
             </a:r>
@@ -8803,7 +8803,7 @@
                 <a:solidFill>
                   <a:srgbClr val="2E3436"/>
                 </a:solidFill>
-                <a:latin typeface="Karla"/>
+                <a:latin typeface="Calibri"/>
               </a:rPr>
               <a:t>No names, in questions or answers.</a:t>
             </a:r>
@@ -8889,7 +8889,7 @@
                 <a:solidFill>
                   <a:srgbClr val="2E3436"/>
                 </a:solidFill>
-                <a:latin typeface="Karla"/>
+                <a:latin typeface="Calibri"/>
               </a:rPr>
               <a:t>Anything tricky goes to a teacher.</a:t>
             </a:r>
@@ -8975,7 +8975,7 @@
                 <a:solidFill>
                   <a:srgbClr val="2E3436"/>
                 </a:solidFill>
-                <a:latin typeface="Karla"/>
+                <a:latin typeface="Calibri"/>
               </a:rPr>
               <a:t>Listening counts too.</a:t>
             </a:r>
@@ -9041,7 +9041,7 @@
                 <a:solidFill>
                   <a:srgbClr val="8B9179"/>
                 </a:solidFill>
-                <a:latin typeface="Karla"/>
+                <a:latin typeface="Calibri"/>
               </a:rPr>
               <a:t>The Pastoral Guide</a:t>
             </a:r>
@@ -9083,7 +9083,7 @@
                 <a:solidFill>
                   <a:srgbClr val="8B9179"/>
                 </a:solidFill>
-                <a:latin typeface="Karla"/>
+                <a:latin typeface="Calibri"/>
               </a:rPr>
               <a:t>16 / 17</a:t>
             </a:r>
@@ -9200,7 +9200,7 @@
                 <a:solidFill>
                   <a:srgbClr val="A8452C"/>
                 </a:solidFill>
-                <a:latin typeface="Karla"/>
+                <a:latin typeface="Calibri"/>
               </a:rPr>
               <a:t>LUNCHTIME  ·  FRIDAY</a:t>
             </a:r>
@@ -9238,11 +9238,11 @@
               </a:spcAft>
             </a:pPr>
             <a:r>
-              <a:rPr sz="3000" b="1" i="0">
+              <a:rPr sz="3000" b="0" i="0">
                 <a:solidFill>
                   <a:srgbClr val="2E3436"/>
                 </a:solidFill>
-                <a:latin typeface="Libre Caslon Display"/>
+                <a:latin typeface="Georgia"/>
               </a:rPr>
               <a:t>Guess the Teacher, Aged 13</a:t>
             </a:r>
@@ -9284,7 +9284,7 @@
                 <a:solidFill>
                   <a:srgbClr val="5C6552"/>
                 </a:solidFill>
-                <a:latin typeface="Karla"/>
+                <a:latin typeface="Calibri"/>
               </a:rPr>
               <a:t>Every photo has a number. Write down who you think it is. Answers at the end of lunch.</a:t>
             </a:r>
@@ -9434,11 +9434,11 @@
               </a:spcAft>
             </a:pPr>
             <a:r>
-              <a:rPr sz="1350" b="1" i="0">
+              <a:rPr sz="1350" b="0" i="0">
                 <a:solidFill>
                   <a:srgbClr val="A8452C"/>
                 </a:solidFill>
-                <a:latin typeface="Libre Caslon Display"/>
+                <a:latin typeface="Georgia"/>
               </a:rPr>
               <a:t>Look at the photo</a:t>
             </a:r>
@@ -9480,7 +9480,7 @@
                 <a:solidFill>
                   <a:srgbClr val="5C6552"/>
                 </a:solidFill>
-                <a:latin typeface="Karla"/>
+                <a:latin typeface="Calibri"/>
               </a:rPr>
               <a:t>Every one is a teacher here, aged 11 to 14.</a:t>
             </a:r>
@@ -9630,11 +9630,11 @@
               </a:spcAft>
             </a:pPr>
             <a:r>
-              <a:rPr sz="1350" b="1" i="0">
+              <a:rPr sz="1350" b="0" i="0">
                 <a:solidFill>
                   <a:srgbClr val="A8452C"/>
                 </a:solidFill>
-                <a:latin typeface="Libre Caslon Display"/>
+                <a:latin typeface="Georgia"/>
               </a:rPr>
               <a:t>Read their worry</a:t>
             </a:r>
@@ -9676,7 +9676,7 @@
                 <a:solidFill>
                   <a:srgbClr val="5C6552"/>
                 </a:solidFill>
-                <a:latin typeface="Karla"/>
+                <a:latin typeface="Calibri"/>
               </a:rPr>
               <a:t>Each one says what they worried about at 13.</a:t>
             </a:r>
@@ -9826,11 +9826,11 @@
               </a:spcAft>
             </a:pPr>
             <a:r>
-              <a:rPr sz="1350" b="1" i="0">
+              <a:rPr sz="1350" b="0" i="0">
                 <a:solidFill>
                   <a:srgbClr val="A8452C"/>
                 </a:solidFill>
-                <a:latin typeface="Libre Caslon Display"/>
+                <a:latin typeface="Georgia"/>
               </a:rPr>
               <a:t>Write your guess</a:t>
             </a:r>
@@ -9872,7 +9872,7 @@
                 <a:solidFill>
                   <a:srgbClr val="5C6552"/>
                 </a:solidFill>
-                <a:latin typeface="Karla"/>
+                <a:latin typeface="Calibri"/>
               </a:rPr>
               <a:t>Number, then name, on the guess sheet.</a:t>
             </a:r>
@@ -9914,7 +9914,7 @@
                 <a:solidFill>
                   <a:srgbClr val="A8452C"/>
                 </a:solidFill>
-                <a:latin typeface="Karla"/>
+                <a:latin typeface="Calibri"/>
               </a:rPr>
               <a:t>Every adult here was your age once, worrying about something.</a:t>
             </a:r>
@@ -9980,7 +9980,7 @@
                 <a:solidFill>
                   <a:srgbClr val="8B9179"/>
                 </a:solidFill>
-                <a:latin typeface="Karla"/>
+                <a:latin typeface="Calibri"/>
               </a:rPr>
               <a:t>The Pastoral Guide</a:t>
             </a:r>
@@ -10022,7 +10022,7 @@
                 <a:solidFill>
                   <a:srgbClr val="8B9179"/>
                 </a:solidFill>
-                <a:latin typeface="Karla"/>
+                <a:latin typeface="Calibri"/>
               </a:rPr>
               <a:t>17 / 17</a:t>
             </a:r>
@@ -10139,7 +10139,7 @@
                 <a:solidFill>
                   <a:srgbClr val="A8452C"/>
                 </a:solidFill>
-                <a:latin typeface="Karla"/>
+                <a:latin typeface="Calibri"/>
               </a:rPr>
               <a:t>OPTION 1  ·  A STUDENT TAPS</a:t>
             </a:r>
@@ -10177,11 +10177,11 @@
               </a:spcAft>
             </a:pPr>
             <a:r>
-              <a:rPr sz="2800" b="1" i="0">
+              <a:rPr sz="2800" b="0" i="0">
                 <a:solidFill>
                   <a:srgbClr val="FFFDF7"/>
                 </a:solidFill>
-                <a:latin typeface="Libre Caslon Display"/>
+                <a:latin typeface="Georgia"/>
               </a:rPr>
               <a:t>A student taps a song.</a:t>
             </a:r>
@@ -10199,11 +10199,11 @@
               </a:spcAft>
             </a:pPr>
             <a:r>
-              <a:rPr sz="2800" b="1" i="0">
+              <a:rPr sz="2800" b="0" i="0">
                 <a:solidFill>
                   <a:srgbClr val="FFFDF7"/>
                 </a:solidFill>
-                <a:latin typeface="Libre Caslon Display"/>
+                <a:latin typeface="Georgia"/>
               </a:rPr>
               <a:t>Can the hall name it?</a:t>
             </a:r>
@@ -10289,7 +10289,7 @@
                 <a:solidFill>
                   <a:srgbClr val="F8DED3"/>
                 </a:solidFill>
-                <a:latin typeface="Karla"/>
+                <a:latin typeface="Calibri"/>
               </a:rPr>
               <a:t>First, our tapper guesses: how many hands will go up?</a:t>
             </a:r>
@@ -10308,7 +10308,7 @@
                 <a:solidFill>
                   <a:srgbClr val="F8DED3"/>
                 </a:solidFill>
-                <a:latin typeface="Karla"/>
+                <a:latin typeface="Calibri"/>
               </a:rPr>
               <a:t>Whisper your guess to the person next to you. No calling out.</a:t>
             </a:r>
@@ -10350,7 +10350,7 @@
                 <a:solidFill>
                   <a:srgbClr val="F8DED3"/>
                 </a:solidFill>
-                <a:latin typeface="Karla"/>
+                <a:latin typeface="Calibri"/>
               </a:rPr>
               <a:t>Using Option 2? Skip this slide.</a:t>
             </a:r>
@@ -10416,7 +10416,7 @@
                 <a:solidFill>
                   <a:srgbClr val="F8DED3"/>
                 </a:solidFill>
-                <a:latin typeface="Karla"/>
+                <a:latin typeface="Calibri"/>
               </a:rPr>
               <a:t>The Pastoral Guide</a:t>
             </a:r>
@@ -10458,7 +10458,7 @@
                 <a:solidFill>
                   <a:srgbClr val="F8DED3"/>
                 </a:solidFill>
-                <a:latin typeface="Karla"/>
+                <a:latin typeface="Calibri"/>
               </a:rPr>
               <a:t>2 / 17</a:t>
             </a:r>
@@ -10575,7 +10575,7 @@
                 <a:solidFill>
                   <a:srgbClr val="A8452C"/>
                 </a:solidFill>
-                <a:latin typeface="Karla"/>
+                <a:latin typeface="Calibri"/>
               </a:rPr>
               <a:t>OPTION 2  ·  A TEACHER TAPS</a:t>
             </a:r>
@@ -10613,11 +10613,11 @@
               </a:spcAft>
             </a:pPr>
             <a:r>
-              <a:rPr sz="2800" b="1" i="0">
+              <a:rPr sz="2800" b="0" i="0">
                 <a:solidFill>
                   <a:srgbClr val="FFFDF7"/>
                 </a:solidFill>
-                <a:latin typeface="Libre Caslon Display"/>
+                <a:latin typeface="Georgia"/>
               </a:rPr>
               <a:t>A teacher taps a song.</a:t>
             </a:r>
@@ -10635,11 +10635,11 @@
               </a:spcAft>
             </a:pPr>
             <a:r>
-              <a:rPr sz="2800" b="1" i="0">
+              <a:rPr sz="2800" b="0" i="0">
                 <a:solidFill>
                   <a:srgbClr val="FFFDF7"/>
                 </a:solidFill>
-                <a:latin typeface="Libre Caslon Display"/>
+                <a:latin typeface="Georgia"/>
               </a:rPr>
               <a:t>Can the hall name it?</a:t>
             </a:r>
@@ -10725,7 +10725,7 @@
                 <a:solidFill>
                   <a:srgbClr val="F8DED3"/>
                 </a:solidFill>
-                <a:latin typeface="Karla"/>
+                <a:latin typeface="Calibri"/>
               </a:rPr>
               <a:t>First, our tapper guesses: how many hands will go up?</a:t>
             </a:r>
@@ -10744,7 +10744,7 @@
                 <a:solidFill>
                   <a:srgbClr val="F8DED3"/>
                 </a:solidFill>
-                <a:latin typeface="Karla"/>
+                <a:latin typeface="Calibri"/>
               </a:rPr>
               <a:t>Whisper your guess to the person next to you. No calling out.</a:t>
             </a:r>
@@ -10786,7 +10786,7 @@
                 <a:solidFill>
                   <a:srgbClr val="F8DED3"/>
                 </a:solidFill>
-                <a:latin typeface="Karla"/>
+                <a:latin typeface="Calibri"/>
               </a:rPr>
               <a:t>Using Option 1? Skip this slide.</a:t>
             </a:r>
@@ -10852,7 +10852,7 @@
                 <a:solidFill>
                   <a:srgbClr val="F8DED3"/>
                 </a:solidFill>
-                <a:latin typeface="Karla"/>
+                <a:latin typeface="Calibri"/>
               </a:rPr>
               <a:t>The Pastoral Guide</a:t>
             </a:r>
@@ -10894,7 +10894,7 @@
                 <a:solidFill>
                   <a:srgbClr val="F8DED3"/>
                 </a:solidFill>
-                <a:latin typeface="Karla"/>
+                <a:latin typeface="Calibri"/>
               </a:rPr>
               <a:t>3 / 17</a:t>
             </a:r>
@@ -10998,7 +10998,7 @@
                 <a:solidFill>
                   <a:srgbClr val="A8452C"/>
                 </a:solidFill>
-                <a:latin typeface="Karla"/>
+                <a:latin typeface="Calibri"/>
               </a:rPr>
               <a:t>WHAT THE RESEARCH FOUND</a:t>
             </a:r>
@@ -11036,11 +11036,11 @@
               </a:spcAft>
             </a:pPr>
             <a:r>
-              <a:rPr sz="2800" b="1" i="0">
+              <a:rPr sz="2800" b="0" i="0">
                 <a:solidFill>
                   <a:srgbClr val="2E3436"/>
                 </a:solidFill>
-                <a:latin typeface="Libre Caslon Display"/>
+                <a:latin typeface="Georgia"/>
               </a:rPr>
               <a:t>It’s harder than it feels</a:t>
             </a:r>
@@ -11082,7 +11082,7 @@
                 <a:solidFill>
                   <a:srgbClr val="5C6552"/>
                 </a:solidFill>
-                <a:latin typeface="Karla"/>
+                <a:latin typeface="Calibri"/>
               </a:rPr>
               <a:t>At Stanford University, people tapped out well-known songs for a listener to guess.</a:t>
             </a:r>
@@ -11166,11 +11166,11 @@
               </a:spcAft>
             </a:pPr>
             <a:r>
-              <a:rPr sz="4400" b="1" i="0">
+              <a:rPr sz="4400" b="0" i="0">
                 <a:solidFill>
                   <a:srgbClr val="A8452C"/>
                 </a:solidFill>
-                <a:latin typeface="Libre Caslon Display"/>
+                <a:latin typeface="Georgia"/>
               </a:rPr>
               <a:t>120</a:t>
             </a:r>
@@ -11212,7 +11212,7 @@
                 <a:solidFill>
                   <a:srgbClr val="5C6552"/>
                 </a:solidFill>
-                <a:latin typeface="Karla"/>
+                <a:latin typeface="Calibri"/>
               </a:rPr>
               <a:t>songs</a:t>
             </a:r>
@@ -11231,7 +11231,7 @@
                 <a:solidFill>
                   <a:srgbClr val="5C6552"/>
                 </a:solidFill>
-                <a:latin typeface="Karla"/>
+                <a:latin typeface="Calibri"/>
               </a:rPr>
               <a:t>were tapped</a:t>
             </a:r>
@@ -11315,11 +11315,11 @@
               </a:spcAft>
             </a:pPr>
             <a:r>
-              <a:rPr sz="4400" b="1" i="0">
+              <a:rPr sz="4400" b="0" i="0">
                 <a:solidFill>
                   <a:srgbClr val="A8452C"/>
                 </a:solidFill>
-                <a:latin typeface="Libre Caslon Display"/>
+                <a:latin typeface="Georgia"/>
               </a:rPr>
               <a:t>50%</a:t>
             </a:r>
@@ -11361,7 +11361,7 @@
                 <a:solidFill>
                   <a:srgbClr val="5C6552"/>
                 </a:solidFill>
-                <a:latin typeface="Karla"/>
+                <a:latin typeface="Calibri"/>
               </a:rPr>
               <a:t>is what the tappers</a:t>
             </a:r>
@@ -11380,7 +11380,7 @@
                 <a:solidFill>
                   <a:srgbClr val="5C6552"/>
                 </a:solidFill>
-                <a:latin typeface="Karla"/>
+                <a:latin typeface="Calibri"/>
               </a:rPr>
               <a:t>expected to be guessed</a:t>
             </a:r>
@@ -11464,11 +11464,11 @@
               </a:spcAft>
             </a:pPr>
             <a:r>
-              <a:rPr sz="4400" b="1" i="0">
+              <a:rPr sz="4400" b="0" i="0">
                 <a:solidFill>
                   <a:srgbClr val="FFFDF7"/>
                 </a:solidFill>
-                <a:latin typeface="Libre Caslon Display"/>
+                <a:latin typeface="Georgia"/>
               </a:rPr>
               <a:t>3</a:t>
             </a:r>
@@ -11510,7 +11510,7 @@
                 <a:solidFill>
                   <a:srgbClr val="F8DED3"/>
                 </a:solidFill>
-                <a:latin typeface="Karla"/>
+                <a:latin typeface="Calibri"/>
               </a:rPr>
               <a:t>songs were</a:t>
             </a:r>
@@ -11529,7 +11529,7 @@
                 <a:solidFill>
                   <a:srgbClr val="F8DED3"/>
                 </a:solidFill>
-                <a:latin typeface="Karla"/>
+                <a:latin typeface="Calibri"/>
               </a:rPr>
               <a:t>guessed right</a:t>
             </a:r>
@@ -11571,7 +11571,7 @@
                 <a:solidFill>
                   <a:srgbClr val="A8452C"/>
                 </a:solidFill>
-                <a:latin typeface="Karla"/>
+                <a:latin typeface="Calibri"/>
               </a:rPr>
               <a:t>The tapper heard the whole tune. Everyone else only heard knocking.</a:t>
             </a:r>
@@ -11613,7 +11613,7 @@
                 <a:solidFill>
                   <a:srgbClr val="8B9179"/>
                 </a:solidFill>
-                <a:latin typeface="Karla"/>
+                <a:latin typeface="Calibri"/>
               </a:rPr>
               <a:t>Source: Newton, 1990</a:t>
             </a:r>
@@ -11679,7 +11679,7 @@
                 <a:solidFill>
                   <a:srgbClr val="8B9179"/>
                 </a:solidFill>
-                <a:latin typeface="Karla"/>
+                <a:latin typeface="Calibri"/>
               </a:rPr>
               <a:t>The Pastoral Guide</a:t>
             </a:r>
@@ -11721,7 +11721,7 @@
                 <a:solidFill>
                   <a:srgbClr val="8B9179"/>
                 </a:solidFill>
-                <a:latin typeface="Karla"/>
+                <a:latin typeface="Calibri"/>
               </a:rPr>
               <a:t>4 / 17</a:t>
             </a:r>
@@ -11825,7 +11825,7 @@
                 <a:solidFill>
                   <a:srgbClr val="A8452C"/>
                 </a:solidFill>
-                <a:latin typeface="Karla"/>
+                <a:latin typeface="Calibri"/>
               </a:rPr>
               <a:t>THIS YEAR’S THEME</a:t>
             </a:r>
@@ -11863,11 +11863,11 @@
               </a:spcAft>
             </a:pPr>
             <a:r>
-              <a:rPr sz="3200" b="1" i="0">
+              <a:rPr sz="3200" b="0" i="0">
                 <a:solidFill>
                   <a:srgbClr val="2E3436"/>
                 </a:solidFill>
-                <a:latin typeface="Libre Caslon Display"/>
+                <a:latin typeface="Georgia"/>
               </a:rPr>
               <a:t>Step into Our World</a:t>
             </a:r>
@@ -11909,7 +11909,7 @@
                 <a:solidFill>
                   <a:srgbClr val="5C6552"/>
                 </a:solidFill>
-                <a:latin typeface="Karla"/>
+                <a:latin typeface="Calibri"/>
               </a:rPr>
               <a:t>The theme for Children’s Mental Health Week, from the charity Place2Be. It means seeing things from where someone else is standing. The tapping game shows why that is hard.</a:t>
             </a:r>
@@ -12039,7 +12039,7 @@
                 <a:solidFill>
                   <a:srgbClr val="FFFDF7"/>
                 </a:solidFill>
-                <a:latin typeface="Karla"/>
+                <a:latin typeface="Calibri"/>
               </a:rPr>
               <a:t>1</a:t>
             </a:r>
@@ -12077,11 +12077,11 @@
               </a:spcAft>
             </a:pPr>
             <a:r>
-              <a:rPr sz="1300" b="1" i="0">
+              <a:rPr sz="1300" b="0" i="0">
                 <a:solidFill>
                   <a:srgbClr val="A8452C"/>
                 </a:solidFill>
-                <a:latin typeface="Libre Caslon Display"/>
+                <a:latin typeface="Georgia"/>
               </a:rPr>
               <a:t>The tapper could hear the song in their head.</a:t>
             </a:r>
@@ -12123,7 +12123,7 @@
                 <a:solidFill>
                   <a:srgbClr val="5C6552"/>
                 </a:solidFill>
-                <a:latin typeface="Karla"/>
+                <a:latin typeface="Calibri"/>
               </a:rPr>
               <a:t>So it felt obvious. Surely everyone would get it?</a:t>
             </a:r>
@@ -12253,7 +12253,7 @@
                 <a:solidFill>
                   <a:srgbClr val="FFFDF7"/>
                 </a:solidFill>
-                <a:latin typeface="Karla"/>
+                <a:latin typeface="Calibri"/>
               </a:rPr>
               <a:t>2</a:t>
             </a:r>
@@ -12291,11 +12291,11 @@
               </a:spcAft>
             </a:pPr>
             <a:r>
-              <a:rPr sz="1300" b="1" i="0">
+              <a:rPr sz="1300" b="0" i="0">
                 <a:solidFill>
                   <a:srgbClr val="A8452C"/>
                 </a:solidFill>
-                <a:latin typeface="Libre Caslon Display"/>
+                <a:latin typeface="Georgia"/>
               </a:rPr>
               <a:t>Everyone else only heard knocking.</a:t>
             </a:r>
@@ -12337,7 +12337,7 @@
                 <a:solidFill>
                   <a:srgbClr val="5C6552"/>
                 </a:solidFill>
-                <a:latin typeface="Karla"/>
+                <a:latin typeface="Calibri"/>
               </a:rPr>
               <a:t>That was all they had to go on, so most of them could not name it.</a:t>
             </a:r>
@@ -12467,7 +12467,7 @@
                 <a:solidFill>
                   <a:srgbClr val="FFFDF7"/>
                 </a:solidFill>
-                <a:latin typeface="Karla"/>
+                <a:latin typeface="Calibri"/>
               </a:rPr>
               <a:t>3</a:t>
             </a:r>
@@ -12505,11 +12505,11 @@
               </a:spcAft>
             </a:pPr>
             <a:r>
-              <a:rPr sz="1300" b="1" i="0">
+              <a:rPr sz="1300" b="0" i="0">
                 <a:solidFill>
                   <a:srgbClr val="A8452C"/>
                 </a:solidFill>
-                <a:latin typeface="Libre Caslon Display"/>
+                <a:latin typeface="Georgia"/>
               </a:rPr>
               <a:t>Feelings work the same way.</a:t>
             </a:r>
@@ -12551,7 +12551,7 @@
                 <a:solidFill>
                   <a:srgbClr val="5C6552"/>
                 </a:solidFill>
-                <a:latin typeface="Karla"/>
+                <a:latin typeface="Calibri"/>
               </a:rPr>
               <a:t>What is going on inside you feels obvious to you. Other people only hear the knocking.</a:t>
             </a:r>
@@ -12593,7 +12593,7 @@
                 <a:solidFill>
                   <a:srgbClr val="A8452C"/>
                 </a:solidFill>
-                <a:latin typeface="Karla"/>
+                <a:latin typeface="Calibri"/>
               </a:rPr>
               <a:t>Stepping into someone’s world means asking about their song, not guessing from the knocks.</a:t>
             </a:r>
@@ -12659,7 +12659,7 @@
                 <a:solidFill>
                   <a:srgbClr val="8B9179"/>
                 </a:solidFill>
-                <a:latin typeface="Karla"/>
+                <a:latin typeface="Calibri"/>
               </a:rPr>
               <a:t>The Pastoral Guide</a:t>
             </a:r>
@@ -12701,7 +12701,7 @@
                 <a:solidFill>
                   <a:srgbClr val="8B9179"/>
                 </a:solidFill>
-                <a:latin typeface="Karla"/>
+                <a:latin typeface="Calibri"/>
               </a:rPr>
               <a:t>5 / 17</a:t>
             </a:r>
@@ -12805,7 +12805,7 @@
                 <a:solidFill>
                   <a:srgbClr val="A8452C"/>
                 </a:solidFill>
-                <a:latin typeface="Karla"/>
+                <a:latin typeface="Calibri"/>
               </a:rPr>
               <a:t>WHAT THE RESEARCH FOUND</a:t>
             </a:r>
@@ -12843,11 +12843,11 @@
               </a:spcAft>
             </a:pPr>
             <a:r>
-              <a:rPr sz="2800" b="1" i="0">
+              <a:rPr sz="2800" b="0" i="0">
                 <a:solidFill>
                   <a:srgbClr val="2E3436"/>
                 </a:solidFill>
-                <a:latin typeface="Libre Caslon Display"/>
+                <a:latin typeface="Georgia"/>
               </a:rPr>
               <a:t>Fewer people notice than you think</a:t>
             </a:r>
@@ -12977,7 +12977,7 @@
                 <a:solidFill>
                   <a:srgbClr val="FFFDF7"/>
                 </a:solidFill>
-                <a:latin typeface="Karla"/>
+                <a:latin typeface="Calibri"/>
               </a:rPr>
               <a:t>1</a:t>
             </a:r>
@@ -13015,11 +13015,11 @@
               </a:spcAft>
             </a:pPr>
             <a:r>
-              <a:rPr sz="1300" b="1" i="0">
+              <a:rPr sz="1300" b="0" i="0">
                 <a:solidFill>
                   <a:srgbClr val="A8452C"/>
                 </a:solidFill>
-                <a:latin typeface="Libre Caslon Display"/>
+                <a:latin typeface="Georgia"/>
               </a:rPr>
               <a:t>Students wore an embarrassing T-shirt into a room of other students.</a:t>
             </a:r>
@@ -13061,7 +13061,7 @@
                 <a:solidFill>
                   <a:srgbClr val="5C6552"/>
                 </a:solidFill>
-                <a:latin typeface="Karla"/>
+                <a:latin typeface="Calibri"/>
               </a:rPr>
               <a:t>Then they guessed how many people had noticed it.</a:t>
             </a:r>
@@ -13191,7 +13191,7 @@
                 <a:solidFill>
                   <a:srgbClr val="FFFDF7"/>
                 </a:solidFill>
-                <a:latin typeface="Karla"/>
+                <a:latin typeface="Calibri"/>
               </a:rPr>
               <a:t>2</a:t>
             </a:r>
@@ -13229,11 +13229,11 @@
               </a:spcAft>
             </a:pPr>
             <a:r>
-              <a:rPr sz="1300" b="1" i="0">
+              <a:rPr sz="1300" b="0" i="0">
                 <a:solidFill>
                   <a:srgbClr val="A8452C"/>
                 </a:solidFill>
-                <a:latin typeface="Libre Caslon Display"/>
+                <a:latin typeface="Georgia"/>
               </a:rPr>
               <a:t>They guessed about half the room.</a:t>
             </a:r>
@@ -13275,7 +13275,7 @@
                 <a:solidFill>
                   <a:srgbClr val="5C6552"/>
                 </a:solidFill>
-                <a:latin typeface="Karla"/>
+                <a:latin typeface="Calibri"/>
               </a:rPr>
               <a:t>In fact, only about a quarter had.</a:t>
             </a:r>
@@ -13405,7 +13405,7 @@
                 <a:solidFill>
                   <a:srgbClr val="FFFDF7"/>
                 </a:solidFill>
-                <a:latin typeface="Karla"/>
+                <a:latin typeface="Calibri"/>
               </a:rPr>
               <a:t>3</a:t>
             </a:r>
@@ -13443,11 +13443,11 @@
               </a:spcAft>
             </a:pPr>
             <a:r>
-              <a:rPr sz="1300" b="1" i="0">
+              <a:rPr sz="1300" b="0" i="0">
                 <a:solidFill>
                   <a:srgbClr val="A8452C"/>
                 </a:solidFill>
-                <a:latin typeface="Libre Caslon Display"/>
+                <a:latin typeface="Georgia"/>
               </a:rPr>
               <a:t>Everyone else was busy in their own world.</a:t>
             </a:r>
@@ -13489,7 +13489,7 @@
                 <a:solidFill>
                   <a:srgbClr val="5C6552"/>
                 </a:solidFill>
-                <a:latin typeface="Karla"/>
+                <a:latin typeface="Calibri"/>
               </a:rPr>
               <a:t>That is why so few of them noticed.</a:t>
             </a:r>
@@ -13531,7 +13531,7 @@
                 <a:solidFill>
                   <a:srgbClr val="A8452C"/>
                 </a:solidFill>
-                <a:latin typeface="Karla"/>
+                <a:latin typeface="Calibri"/>
               </a:rPr>
               <a:t>So the thing you are worrying about, most people did not see.</a:t>
             </a:r>
@@ -13573,7 +13573,7 @@
                 <a:solidFill>
                   <a:srgbClr val="8B9179"/>
                 </a:solidFill>
-                <a:latin typeface="Karla"/>
+                <a:latin typeface="Calibri"/>
               </a:rPr>
               <a:t>Source: Gilovich, Medvec and Savitsky, 2000</a:t>
             </a:r>
@@ -13639,7 +13639,7 @@
                 <a:solidFill>
                   <a:srgbClr val="8B9179"/>
                 </a:solidFill>
-                <a:latin typeface="Karla"/>
+                <a:latin typeface="Calibri"/>
               </a:rPr>
               <a:t>The Pastoral Guide</a:t>
             </a:r>
@@ -13681,7 +13681,7 @@
                 <a:solidFill>
                   <a:srgbClr val="8B9179"/>
                 </a:solidFill>
-                <a:latin typeface="Karla"/>
+                <a:latin typeface="Calibri"/>
               </a:rPr>
               <a:t>6 / 17</a:t>
             </a:r>
@@ -13785,7 +13785,7 @@
                 <a:solidFill>
                   <a:srgbClr val="A8452C"/>
                 </a:solidFill>
-                <a:latin typeface="Karla"/>
+                <a:latin typeface="Calibri"/>
               </a:rPr>
               <a:t>WHAT THE RESEARCH FOUND</a:t>
             </a:r>
@@ -13823,11 +13823,11 @@
               </a:spcAft>
             </a:pPr>
             <a:r>
-              <a:rPr sz="2800" b="1" i="0">
+              <a:rPr sz="2800" b="0" i="0">
                 <a:solidFill>
                   <a:srgbClr val="2E3436"/>
                 </a:solidFill>
-                <a:latin typeface="Libre Caslon Display"/>
+                <a:latin typeface="Georgia"/>
               </a:rPr>
               <a:t>People like you more than you think</a:t>
             </a:r>
@@ -13957,7 +13957,7 @@
                 <a:solidFill>
                   <a:srgbClr val="FFFDF7"/>
                 </a:solidFill>
-                <a:latin typeface="Karla"/>
+                <a:latin typeface="Calibri"/>
               </a:rPr>
               <a:t>1</a:t>
             </a:r>
@@ -13995,11 +13995,11 @@
               </a:spcAft>
             </a:pPr>
             <a:r>
-              <a:rPr sz="1300" b="1" i="0">
+              <a:rPr sz="1300" b="0" i="0">
                 <a:solidFill>
                   <a:srgbClr val="A8452C"/>
                 </a:solidFill>
-                <a:latin typeface="Libre Caslon Display"/>
+                <a:latin typeface="Georgia"/>
               </a:rPr>
               <a:t>Strangers had a short conversation, then rated each other.</a:t>
             </a:r>
@@ -14041,7 +14041,7 @@
                 <a:solidFill>
                   <a:srgbClr val="5C6552"/>
                 </a:solidFill>
-                <a:latin typeface="Karla"/>
+                <a:latin typeface="Calibri"/>
               </a:rPr>
               <a:t>They also guessed how much the other person liked them.</a:t>
             </a:r>
@@ -14171,7 +14171,7 @@
                 <a:solidFill>
                   <a:srgbClr val="FFFDF7"/>
                 </a:solidFill>
-                <a:latin typeface="Karla"/>
+                <a:latin typeface="Calibri"/>
               </a:rPr>
               <a:t>2</a:t>
             </a:r>
@@ -14209,11 +14209,11 @@
               </a:spcAft>
             </a:pPr>
             <a:r>
-              <a:rPr sz="1300" b="1" i="0">
+              <a:rPr sz="1300" b="0" i="0">
                 <a:solidFill>
                   <a:srgbClr val="A8452C"/>
                 </a:solidFill>
-                <a:latin typeface="Libre Caslon Display"/>
+                <a:latin typeface="Georgia"/>
               </a:rPr>
               <a:t>Most people guessed too low.</a:t>
             </a:r>
@@ -14255,7 +14255,7 @@
                 <a:solidFill>
                   <a:srgbClr val="5C6552"/>
                 </a:solidFill>
-                <a:latin typeface="Karla"/>
+                <a:latin typeface="Calibri"/>
               </a:rPr>
               <a:t>Their partner liked them more, and enjoyed the chat more, than they thought.</a:t>
             </a:r>
@@ -14385,7 +14385,7 @@
                 <a:solidFill>
                   <a:srgbClr val="FFFDF7"/>
                 </a:solidFill>
-                <a:latin typeface="Karla"/>
+                <a:latin typeface="Calibri"/>
               </a:rPr>
               <a:t>3</a:t>
             </a:r>
@@ -14423,11 +14423,11 @@
               </a:spcAft>
             </a:pPr>
             <a:r>
-              <a:rPr sz="1300" b="1" i="0">
+              <a:rPr sz="1300" b="0" i="0">
                 <a:solidFill>
                   <a:srgbClr val="A8452C"/>
                 </a:solidFill>
-                <a:latin typeface="Libre Caslon Display"/>
+                <a:latin typeface="Georgia"/>
               </a:rPr>
               <a:t>Researchers called it the liking gap.</a:t>
             </a:r>
@@ -14469,7 +14469,7 @@
                 <a:solidFill>
                   <a:srgbClr val="5C6552"/>
                 </a:solidFill>
-                <a:latin typeface="Karla"/>
+                <a:latin typeface="Calibri"/>
               </a:rPr>
               <a:t>In students sharing a university flat, it lasted for months.</a:t>
             </a:r>
@@ -14511,7 +14511,7 @@
                 <a:solidFill>
                   <a:srgbClr val="A8452C"/>
                 </a:solidFill>
-                <a:latin typeface="Karla"/>
+                <a:latin typeface="Calibri"/>
               </a:rPr>
               <a:t>Think about it: who have you decided does not like you, without asking?</a:t>
             </a:r>
@@ -14553,7 +14553,7 @@
                 <a:solidFill>
                   <a:srgbClr val="8B9179"/>
                 </a:solidFill>
-                <a:latin typeface="Karla"/>
+                <a:latin typeface="Calibri"/>
               </a:rPr>
               <a:t>Source: Boothby and colleagues, 2018</a:t>
             </a:r>
@@ -14619,7 +14619,7 @@
                 <a:solidFill>
                   <a:srgbClr val="8B9179"/>
                 </a:solidFill>
-                <a:latin typeface="Karla"/>
+                <a:latin typeface="Calibri"/>
               </a:rPr>
               <a:t>The Pastoral Guide</a:t>
             </a:r>
@@ -14661,7 +14661,7 @@
                 <a:solidFill>
                   <a:srgbClr val="8B9179"/>
                 </a:solidFill>
-                <a:latin typeface="Karla"/>
+                <a:latin typeface="Calibri"/>
               </a:rPr>
               <a:t>7 / 17</a:t>
             </a:r>
@@ -14765,7 +14765,7 @@
                 <a:solidFill>
                   <a:srgbClr val="A8452C"/>
                 </a:solidFill>
-                <a:latin typeface="Karla"/>
+                <a:latin typeface="Calibri"/>
               </a:rPr>
               <a:t>WHAT THE RESEARCH FOUND</a:t>
             </a:r>
@@ -14803,11 +14803,11 @@
               </a:spcAft>
             </a:pPr>
             <a:r>
-              <a:rPr sz="2600" b="1" i="0">
+              <a:rPr sz="2600" b="0" i="0">
                 <a:solidFill>
                   <a:srgbClr val="2E3436"/>
                 </a:solidFill>
-                <a:latin typeface="Libre Caslon Display"/>
+                <a:latin typeface="Georgia"/>
               </a:rPr>
               <a:t>Real talk goes better than we expect</a:t>
             </a:r>
@@ -14937,7 +14937,7 @@
                 <a:solidFill>
                   <a:srgbClr val="FFFDF7"/>
                 </a:solidFill>
-                <a:latin typeface="Karla"/>
+                <a:latin typeface="Calibri"/>
               </a:rPr>
               <a:t>1</a:t>
             </a:r>
@@ -14975,11 +14975,11 @@
               </a:spcAft>
             </a:pPr>
             <a:r>
-              <a:rPr sz="1300" b="1" i="0">
+              <a:rPr sz="1300" b="0" i="0">
                 <a:solidFill>
                   <a:srgbClr val="A8452C"/>
                 </a:solidFill>
-                <a:latin typeface="Libre Caslon Display"/>
+                <a:latin typeface="Georgia"/>
               </a:rPr>
               <a:t>Over 1,800 people had conversations with strangers.</a:t>
             </a:r>
@@ -15021,7 +15021,7 @@
                 <a:solidFill>
                   <a:srgbClr val="5C6552"/>
                 </a:solidFill>
-                <a:latin typeface="Karla"/>
+                <a:latin typeface="Calibri"/>
               </a:rPr>
               <a:t>Some talked about the weather. Some answered real questions.</a:t>
             </a:r>
@@ -15151,7 +15151,7 @@
                 <a:solidFill>
                   <a:srgbClr val="FFFDF7"/>
                 </a:solidFill>
-                <a:latin typeface="Karla"/>
+                <a:latin typeface="Calibri"/>
               </a:rPr>
               <a:t>2</a:t>
             </a:r>
@@ -15189,11 +15189,11 @@
               </a:spcAft>
             </a:pPr>
             <a:r>
-              <a:rPr sz="1300" b="1" i="0">
+              <a:rPr sz="1300" b="0" i="0">
                 <a:solidFill>
                   <a:srgbClr val="A8452C"/>
                 </a:solidFill>
-                <a:latin typeface="Libre Caslon Display"/>
+                <a:latin typeface="Georgia"/>
               </a:rPr>
               <a:t>They expected the real questions to be awkward.</a:t>
             </a:r>
@@ -15235,7 +15235,7 @@
                 <a:solidFill>
                   <a:srgbClr val="5C6552"/>
                 </a:solidFill>
-                <a:latin typeface="Karla"/>
+                <a:latin typeface="Calibri"/>
               </a:rPr>
               <a:t>They were less awkward and more enjoyable than they guessed.</a:t>
             </a:r>
@@ -15365,7 +15365,7 @@
                 <a:solidFill>
                   <a:srgbClr val="FFFDF7"/>
                 </a:solidFill>
-                <a:latin typeface="Karla"/>
+                <a:latin typeface="Calibri"/>
               </a:rPr>
               <a:t>3</a:t>
             </a:r>
@@ -15403,11 +15403,11 @@
               </a:spcAft>
             </a:pPr>
             <a:r>
-              <a:rPr sz="1300" b="1" i="0">
+              <a:rPr sz="1300" b="0" i="0">
                 <a:solidFill>
                   <a:srgbClr val="A8452C"/>
                 </a:solidFill>
-                <a:latin typeface="Libre Caslon Display"/>
+                <a:latin typeface="Georgia"/>
               </a:rPr>
               <a:t>People thought the other person would not be interested.</a:t>
             </a:r>
@@ -15449,7 +15449,7 @@
                 <a:solidFill>
                   <a:srgbClr val="5C6552"/>
                 </a:solidFill>
-                <a:latin typeface="Karla"/>
+                <a:latin typeface="Calibri"/>
               </a:rPr>
               <a:t>The other person was more interested than they expected.</a:t>
             </a:r>
@@ -15491,7 +15491,7 @@
                 <a:solidFill>
                   <a:srgbClr val="A8452C"/>
                 </a:solidFill>
-                <a:latin typeface="Karla"/>
+                <a:latin typeface="Calibri"/>
               </a:rPr>
               <a:t>Most people want to be asked properly. Most people want to be heard.</a:t>
             </a:r>
@@ -15533,7 +15533,7 @@
                 <a:solidFill>
                   <a:srgbClr val="8B9179"/>
                 </a:solidFill>
-                <a:latin typeface="Karla"/>
+                <a:latin typeface="Calibri"/>
               </a:rPr>
               <a:t>Source: Kardas, Kumar and Epley, 2022</a:t>
             </a:r>
@@ -15599,7 +15599,7 @@
                 <a:solidFill>
                   <a:srgbClr val="8B9179"/>
                 </a:solidFill>
-                <a:latin typeface="Karla"/>
+                <a:latin typeface="Calibri"/>
               </a:rPr>
               <a:t>The Pastoral Guide</a:t>
             </a:r>
@@ -15641,7 +15641,7 @@
                 <a:solidFill>
                   <a:srgbClr val="8B9179"/>
                 </a:solidFill>
-                <a:latin typeface="Karla"/>
+                <a:latin typeface="Calibri"/>
               </a:rPr>
               <a:t>8 / 17</a:t>
             </a:r>
@@ -15745,7 +15745,7 @@
                 <a:solidFill>
                   <a:srgbClr val="A8452C"/>
                 </a:solidFill>
-                <a:latin typeface="Karla"/>
+                <a:latin typeface="Calibri"/>
               </a:rPr>
               <a:t>SO, STEP INTO SOMEONE ELSE’S WORLD</a:t>
             </a:r>
@@ -15783,11 +15783,11 @@
               </a:spcAft>
             </a:pPr>
             <a:r>
-              <a:rPr sz="3200" b="1" i="0">
+              <a:rPr sz="3200" b="0" i="0">
                 <a:solidFill>
                   <a:srgbClr val="2E3436"/>
                 </a:solidFill>
-                <a:latin typeface="Libre Caslon Display"/>
+                <a:latin typeface="Georgia"/>
               </a:rPr>
               <a:t>Three things to try this week</a:t>
             </a:r>
@@ -15937,11 +15937,11 @@
               </a:spcAft>
             </a:pPr>
             <a:r>
-              <a:rPr sz="1350" b="1" i="0">
+              <a:rPr sz="1350" b="0" i="0">
                 <a:solidFill>
                   <a:srgbClr val="A8452C"/>
                 </a:solidFill>
-                <a:latin typeface="Libre Caslon Display"/>
+                <a:latin typeface="Georgia"/>
               </a:rPr>
               <a:t>Look up</a:t>
             </a:r>
@@ -15983,7 +15983,7 @@
                 <a:solidFill>
                   <a:srgbClr val="5C6552"/>
                 </a:solidFill>
-                <a:latin typeface="Karla"/>
+                <a:latin typeface="Calibri"/>
               </a:rPr>
               <a:t>Everyone is busier in their own world than you think.</a:t>
             </a:r>
@@ -16133,11 +16133,11 @@
               </a:spcAft>
             </a:pPr>
             <a:r>
-              <a:rPr sz="1350" b="1" i="0">
+              <a:rPr sz="1350" b="0" i="0">
                 <a:solidFill>
                   <a:srgbClr val="A8452C"/>
                 </a:solidFill>
-                <a:latin typeface="Libre Caslon Display"/>
+                <a:latin typeface="Georgia"/>
               </a:rPr>
               <a:t>Ask properly</a:t>
             </a:r>
@@ -16179,7 +16179,7 @@
                 <a:solidFill>
                   <a:srgbClr val="5C6552"/>
                 </a:solidFill>
-                <a:latin typeface="Karla"/>
+                <a:latin typeface="Calibri"/>
               </a:rPr>
               <a:t>A real question. Most people want one.</a:t>
             </a:r>
@@ -16329,11 +16329,11 @@
               </a:spcAft>
             </a:pPr>
             <a:r>
-              <a:rPr sz="1350" b="1" i="0">
+              <a:rPr sz="1350" b="0" i="0">
                 <a:solidFill>
                   <a:srgbClr val="A8452C"/>
                 </a:solidFill>
-                <a:latin typeface="Libre Caslon Display"/>
+                <a:latin typeface="Georgia"/>
               </a:rPr>
               <a:t>Listen to the answer</a:t>
             </a:r>
@@ -16375,7 +16375,7 @@
                 <a:solidFill>
                   <a:srgbClr val="5C6552"/>
                 </a:solidFill>
-                <a:latin typeface="Karla"/>
+                <a:latin typeface="Calibri"/>
               </a:rPr>
               <a:t>You can’t hear their song until they tell you.</a:t>
             </a:r>
@@ -16417,7 +16417,7 @@
                 <a:solidFill>
                   <a:srgbClr val="A8452C"/>
                 </a:solidFill>
-                <a:latin typeface="Karla"/>
+                <a:latin typeface="Calibri"/>
               </a:rPr>
               <a:t>And if someone asks you, tell them.</a:t>
             </a:r>
@@ -16483,7 +16483,7 @@
                 <a:solidFill>
                   <a:srgbClr val="8B9179"/>
                 </a:solidFill>
-                <a:latin typeface="Karla"/>
+                <a:latin typeface="Calibri"/>
               </a:rPr>
               <a:t>The Pastoral Guide</a:t>
             </a:r>
@@ -16525,7 +16525,7 @@
                 <a:solidFill>
                   <a:srgbClr val="8B9179"/>
                 </a:solidFill>
-                <a:latin typeface="Karla"/>
+                <a:latin typeface="Calibri"/>
               </a:rPr>
               <a:t>9 / 17</a:t>
             </a:r>
